--- a/courses/COLL150-Fall26/Slides/Unit 4 - Sentient Object Tsukumogami.pptx
+++ b/courses/COLL150-Fall26/Slides/Unit 4 - Sentient Object Tsukumogami.pptx
@@ -7195,17 +7195,6 @@
             <a:pPr marL="0" indent="0">
               <a:buNone/>
             </a:pPr>
-            <a:r>
-              <a:rPr lang="en-US" sz="1500" i="1" dirty="0">
-                <a:solidFill>
-                  <a:srgbClr val="2E4A7D"/>
-                </a:solidFill>
-                <a:latin typeface="Cambria" pitchFamily="34" charset="0"/>
-                <a:ea typeface="Cambria" pitchFamily="34" charset="-122"/>
-                <a:cs typeface="Cambria" pitchFamily="34" charset="-120"/>
-              </a:rPr>
-              <a:t>Read move two again. The offence that produces the monsters is disposal — and we will come back to that in about two hours.</a:t>
-            </a:r>
             <a:endParaRPr lang="en-US" sz="1500" dirty="0"/>
           </a:p>
         </p:txBody>
